--- a/tests/fixtures/sample-deck.pptx
+++ b/tests/fixtures/sample-deck.pptx
@@ -7,9 +7,10 @@
   <p:sldIdLst>
     <p:sldId id="256" r:id="rId2"/>
     <p:sldId id="257" r:id="rId3"/>
+    <p:sldId id="258" r:id="rId4"/>
   </p:sldIdLst>
   <p:notesMasterIdLst>
-    <p:notesMasterId r:id="rId4"/>
+    <p:notesMasterId r:id="rId5"/>
   </p:notesMasterIdLst>
   <p:sldSz cx="12192000" cy="6858000"/>
   <p:notesSz cx="6858000" cy="12192000"/>
@@ -615,6 +616,94 @@
             <a:fld id="{F7021451-1387-4CA6-816F-3879F97B5CBC}" type="slidenum">
               <a:rPr lang="en-US"/>
               <a:t>2</a:t>
+            </a:fld>
+            <a:endParaRPr lang="en-US"/>
+          </a:p>
+        </p:txBody>
+      </p:sp>
+    </p:spTree>
+    <p:extLst>
+      <p:ext uri="{BB962C8B-B14F-4D97-AF65-F5344CB8AC3E}">
+        <p14:creationId xmlns:p14="http://schemas.microsoft.com/office/powerpoint/2010/main" val="1024086991"/>
+      </p:ext>
+    </p:extLst>
+  </p:cSld>
+  <p:clrMapOvr>
+    <a:masterClrMapping/>
+  </p:clrMapOvr>
+</p:notes>
+</file>
+
+<file path=ppt/notesSlides/notesSlide3.xml><?xml version="1.0" encoding="utf-8"?>
+<p:notes xmlns:a="http://schemas.openxmlformats.org/drawingml/2006/main" xmlns:r="http://schemas.openxmlformats.org/officeDocument/2006/relationships" xmlns:p="http://schemas.openxmlformats.org/presentationml/2006/main">
+  <p:cSld>
+    <p:spTree>
+      <p:nvGrpSpPr>
+        <p:cNvPr id="1" name=""/>
+        <p:cNvGrpSpPr/>
+        <p:nvPr/>
+      </p:nvGrpSpPr>
+      <p:grpSpPr>
+        <a:xfrm>
+          <a:off x="0" y="0"/>
+          <a:ext cx="0" cy="0"/>
+          <a:chOff x="0" y="0"/>
+          <a:chExt cx="0" cy="0"/>
+        </a:xfrm>
+      </p:grpSpPr>
+      <p:sp>
+        <p:nvSpPr>
+          <p:cNvPr id="2" name="Slide Image Placeholder 1"/>
+          <p:cNvSpPr>
+            <a:spLocks noGrp="1" noRot="1" noChangeAspect="1"/>
+          </p:cNvSpPr>
+          <p:nvPr>
+            <p:ph type="sldImg"/>
+          </p:nvPr>
+        </p:nvSpPr>
+        <p:spPr/>
+      </p:sp>
+      <p:sp>
+        <p:nvSpPr>
+          <p:cNvPr id="3" name="Notes Placeholder 2"/>
+          <p:cNvSpPr>
+            <a:spLocks noGrp="1"/>
+          </p:cNvSpPr>
+          <p:nvPr>
+            <p:ph type="body" idx="1"/>
+          </p:nvPr>
+        </p:nvSpPr>
+        <p:spPr/>
+        <p:txBody>
+          <a:bodyPr/>
+          <a:lstStyle/>
+          <a:p>
+            <a:r>
+              <a:rPr lang="en-US" dirty="0"/>
+              <a:t/>
+            </a:r>
+            <a:endParaRPr lang="en-US" dirty="0"/>
+          </a:p>
+        </p:txBody>
+      </p:sp>
+      <p:sp>
+        <p:nvSpPr>
+          <p:cNvPr id="4" name="Slide Number Placeholder 3"/>
+          <p:cNvSpPr>
+            <a:spLocks noGrp="1"/>
+          </p:cNvSpPr>
+          <p:nvPr>
+            <p:ph type="sldNum" sz="quarter" idx="10"/>
+          </p:nvPr>
+        </p:nvSpPr>
+        <p:spPr/>
+        <p:txBody>
+          <a:bodyPr/>
+          <a:lstStyle/>
+          <a:p>
+            <a:fld id="{F7021451-1387-4CA6-816F-3879F97B5CBC}" type="slidenum">
+              <a:rPr lang="en-US"/>
+              <a:t>3</a:t>
             </a:fld>
             <a:endParaRPr lang="en-US"/>
           </a:p>
@@ -1009,7 +1098,7 @@
         <p:spPr>
           <a:xfrm>
             <a:off x="548640" y="1371600"/>
-            <a:ext cx="4572000" cy="457200"/>
+            <a:ext cx="6400800" cy="457200"/>
           </a:xfrm>
           <a:prstGeom prst="rect">
             <a:avLst/>
@@ -1093,7 +1182,7 @@
                   <a:srgbClr val="FFFFFF"/>
                 </a:solidFill>
               </a:rPr>
-              <a:t>Launch checklist</a:t>
+              <a:t>Regression coverage</a:t>
             </a:r>
             <a:endParaRPr lang="en-US" sz="1800" dirty="0"/>
           </a:p>
@@ -1130,7 +1219,7 @@
                   <a:srgbClr val="DBEAFE"/>
                 </a:solidFill>
               </a:rPr>
-              <a:t>UI polish complete</a:t>
+              <a:t>Initial render</a:t>
             </a:r>
             <a:endParaRPr lang="en-US" sz="1400" dirty="0"/>
           </a:p>
@@ -1145,7 +1234,7 @@
                   <a:srgbClr val="DBEAFE"/>
                 </a:solidFill>
               </a:rPr>
-              <a:t>Playback stable</a:t>
+              <a:t>Independent tabs</a:t>
             </a:r>
             <a:endParaRPr lang="en-US" sz="1400" dirty="0"/>
           </a:p>
@@ -1160,7 +1249,7 @@
                   <a:srgbClr val="DBEAFE"/>
                 </a:solidFill>
               </a:rPr>
-              <a:t>Regression tests green</a:t>
+              <a:t>Stable controls</a:t>
             </a:r>
             <a:endParaRPr lang="en-US" sz="1400" dirty="0"/>
           </a:p>
@@ -1264,7 +1353,7 @@
                   <a:srgbClr val="D1D5DB"/>
                 </a:solidFill>
               </a:rPr>
-              <a:t>Navigation and zoom validation</a:t>
+              <a:t>Navigation regression fixture</a:t>
             </a:r>
             <a:endParaRPr lang="en-US" sz="1400" dirty="0"/>
           </a:p>
@@ -1330,6 +1419,135 @@
             <a:endParaRPr lang="en-US" sz="2000" dirty="0"/>
           </a:p>
         </p:txBody>
+      </p:sp>
+    </p:spTree>
+  </p:cSld>
+  <p:clrMapOvr>
+    <a:masterClrMapping/>
+  </p:clrMapOvr>
+</p:sld>
+</file>
+
+<file path=ppt/slides/slide3.xml><?xml version="1.0" encoding="utf-8"?>
+<p:sld xmlns:a="http://schemas.openxmlformats.org/drawingml/2006/main" xmlns:r="http://schemas.openxmlformats.org/officeDocument/2006/relationships" xmlns:p="http://schemas.openxmlformats.org/presentationml/2006/main">
+  <p:cSld name="Slide 3">
+    <p:bg>
+      <p:bgPr>
+        <a:solidFill>
+          <a:srgbClr val="172554"/>
+        </a:solidFill>
+      </p:bgPr>
+    </p:bg>
+    <p:spTree>
+      <p:nvGrpSpPr>
+        <p:cNvPr id="1" name=""/>
+        <p:cNvGrpSpPr/>
+        <p:nvPr/>
+      </p:nvGrpSpPr>
+      <p:grpSpPr>
+        <a:xfrm>
+          <a:off x="0" y="0"/>
+          <a:ext cx="0" cy="0"/>
+          <a:chOff x="0" y="0"/>
+          <a:chExt cx="0" cy="0"/>
+        </a:xfrm>
+      </p:grpSpPr>
+      <p:sp>
+        <p:nvSpPr>
+          <p:cNvPr id="2" name="Text 0"/>
+          <p:cNvSpPr/>
+          <p:nvPr/>
+        </p:nvSpPr>
+        <p:spPr>
+          <a:xfrm>
+            <a:off x="548640" y="640080"/>
+            <a:ext cx="8229600" cy="548640"/>
+          </a:xfrm>
+          <a:prstGeom prst="rect">
+            <a:avLst/>
+          </a:prstGeom>
+          <a:noFill/>
+          <a:ln/>
+        </p:spPr>
+        <p:txBody>
+          <a:bodyPr wrap="square" rtlCol="0" anchor="ctr"/>
+          <a:lstStyle/>
+          <a:p>
+            <a:pPr indent="0" marL="0">
+              <a:buNone/>
+            </a:pPr>
+            <a:r>
+              <a:rPr lang="en-US" sz="2400" b="1" dirty="0">
+                <a:solidFill>
+                  <a:srgbClr val="FFFFFF"/>
+                </a:solidFill>
+              </a:rPr>
+              <a:t>Regression fixture slide 3</a:t>
+            </a:r>
+            <a:endParaRPr lang="en-US" sz="2400" dirty="0"/>
+          </a:p>
+        </p:txBody>
+      </p:sp>
+      <p:sp>
+        <p:nvSpPr>
+          <p:cNvPr id="3" name="Text 1"/>
+          <p:cNvSpPr/>
+          <p:nvPr/>
+        </p:nvSpPr>
+        <p:spPr>
+          <a:xfrm>
+            <a:off x="548640" y="1371600"/>
+            <a:ext cx="5486400" cy="365760"/>
+          </a:xfrm>
+          <a:prstGeom prst="rect">
+            <a:avLst/>
+          </a:prstGeom>
+          <a:noFill/>
+          <a:ln/>
+        </p:spPr>
+        <p:txBody>
+          <a:bodyPr wrap="square" rtlCol="0" anchor="ctr"/>
+          <a:lstStyle/>
+          <a:p>
+            <a:pPr indent="0" marL="0">
+              <a:buNone/>
+            </a:pPr>
+            <a:r>
+              <a:rPr lang="en-US" sz="1400" dirty="0">
+                <a:solidFill>
+                  <a:srgbClr val="E5E7EB"/>
+                </a:solidFill>
+              </a:rPr>
+              <a:t>Used to prove active tab state is isolated.</a:t>
+            </a:r>
+            <a:endParaRPr lang="en-US" sz="1400" dirty="0"/>
+          </a:p>
+        </p:txBody>
+      </p:sp>
+      <p:sp>
+        <p:nvSpPr>
+          <p:cNvPr id="4" name="Shape 2"/>
+          <p:cNvSpPr/>
+          <p:nvPr/>
+        </p:nvSpPr>
+        <p:spPr>
+          <a:xfrm>
+            <a:off x="914400" y="2011680"/>
+            <a:ext cx="3840480" cy="2194560"/>
+          </a:xfrm>
+          <a:prstGeom prst="ellipse">
+            <a:avLst/>
+          </a:prstGeom>
+          <a:solidFill>
+            <a:srgbClr val="0EA5E9"/>
+          </a:solidFill>
+          <a:ln w="12700">
+            <a:solidFill>
+              <a:srgbClr val="7DD3FC"/>
+            </a:solidFill>
+            <a:prstDash val="solid"/>
+          </a:ln>
+        </p:spPr>
       </p:sp>
     </p:spTree>
   </p:cSld>
